--- a/presentacion/Claude_Code_Presentacion_EN.pptx
+++ b/presentacion/Claude_Code_Presentacion_EN.pptx
@@ -46850,52 +46850,7 @@
                 </a:solidFill>
                 <a:latin typeface="Segoe UI"/>
               </a:rPr>
-              <a:t>A </a:t>
-            </a:r>
-            <a:r>
-              <a:rPr sz="3000" b="1" dirty="0" err="1">
-                <a:solidFill>
-                  <a:srgbClr val="E8EAED"/>
-                </a:solidFill>
-                <a:latin typeface="Segoe UI"/>
-              </a:rPr>
-              <a:t>example</a:t>
-            </a:r>
-            <a:r>
-              <a:rPr sz="3000" b="1" dirty="0">
-                <a:solidFill>
-                  <a:srgbClr val="E8EAED"/>
-                </a:solidFill>
-                <a:latin typeface="Segoe UI"/>
-              </a:rPr>
-              <a:t> real, </a:t>
-            </a:r>
-            <a:r>
-              <a:rPr lang="en-GB" sz="3000" b="1" dirty="0" err="1">
-                <a:solidFill>
-                  <a:srgbClr val="E8EAED"/>
-                </a:solidFill>
-                <a:latin typeface="Segoe UI"/>
-              </a:rPr>
-              <a:t>Architecture</a:t>
-            </a:r>
-            <a:r>
-              <a:rPr lang="en-GB" sz="3000" b="1" dirty="0">
-                <a:solidFill>
-                  <a:srgbClr val="E8EAED"/>
-                </a:solidFill>
-                <a:latin typeface="Segoe UI"/>
-              </a:rPr>
-              <a:t> </a:t>
-            </a:r>
-            <a:r>
-              <a:rPr lang="en-GB" sz="3000" b="1" dirty="0" err="1">
-                <a:solidFill>
-                  <a:srgbClr val="E8EAED"/>
-                </a:solidFill>
-                <a:latin typeface="Segoe UI"/>
-              </a:rPr>
-              <a:t>Application</a:t>
+              <a:t>A real example: application architecture</a:t>
             </a:r>
             <a:endParaRPr sz="3000" b="1" dirty="0">
               <a:solidFill>

--- a/presentacion/Claude_Code_Presentacion_EN.pptx
+++ b/presentacion/Claude_Code_Presentacion_EN.pptx
@@ -36431,7 +36431,7 @@
                 </a:solidFill>
                 <a:latin typeface="Segoe UI"/>
               </a:rPr>
-              <a:t>→ rebuild locally, or ONE single publisher</a:t>
+              <a:t>→ ONE single publisher. "Derived" is per file, not per folder</a:t>
             </a:r>
           </a:p>
         </p:txBody>
@@ -41566,7 +41566,7 @@
                 </a:solidFill>
                 <a:latin typeface="Segoe UI"/>
               </a:rPr>
-              <a:t>Recall in dense zones · EXTRACTED = reliable, INFERRED = hint · internal (data/) · derived: never travels, gets rebuilt</a:t>
+              <a:t>Recall in dense zones · EXTRACTED = reliable, INFERRED = hint · internal (data/) · derived gets rebuilt, but hand-authored files travel</a:t>
             </a:r>
           </a:p>
         </p:txBody>

--- a/presentacion/Claude_Code_Presentacion_EN.pptx
+++ b/presentacion/Claude_Code_Presentacion_EN.pptx
@@ -36191,7 +36191,7 @@
                 </a:solidFill>
                 <a:latin typeface="Segoe UI"/>
               </a:rPr>
-              <a:t>Bucket versioning = recovery net</a:t>
+              <a:t>Versioning = 30 days, not a merge · guard pull AND push</a:t>
             </a:r>
           </a:p>
         </p:txBody>
